--- a/set/2026-06-21 El Camino Baptist Church-CH.pptx
+++ b/set/2026-06-21 El Camino Baptist Church-CH.pptx
@@ -4213,7 +4213,7 @@
                 <a:latin typeface="Avenir Medium" panose="02000503020000020003" pitchFamily="2" charset="0"/>
                 <a:ea typeface="Bodoni Ornaments" pitchFamily="2" charset="0"/>
               </a:rPr>
-              <a:t>      F     </a:t>
+              <a:t>      F                                                C</a:t>
             </a:r>
           </a:p>
           <a:p>
@@ -6128,7 +6128,7 @@
                 <a:latin typeface="Avenir Medium" panose="02000503020000020003" pitchFamily="2" charset="0"/>
                 <a:ea typeface="Bodoni Ornaments" pitchFamily="2" charset="0"/>
               </a:rPr>
-              <a:t>                  Em  </a:t>
+              <a:t>                  G  </a:t>
             </a:r>
           </a:p>
           <a:p>
@@ -9363,7 +9363,7 @@
                 <a:latin typeface="Avenir Medium" panose="02000503020000020003" pitchFamily="2" charset="0"/>
                 <a:ea typeface="Bodoni Ornaments" pitchFamily="2" charset="0"/>
               </a:rPr>
-              <a:t>                   Em</a:t>
+              <a:t>                   G</a:t>
             </a:r>
           </a:p>
           <a:p>
@@ -9478,6 +9478,19 @@
             <a:noAutofit/>
           </a:bodyPr>
           <a:lstStyle/>
+          <a:p>
+            <a:pPr algn="l"/>
+            <a:r>
+              <a:rPr lang="en-US" sz="3600" dirty="0">
+                <a:solidFill>
+                  <a:srgbClr val="FFFF00"/>
+                </a:solidFill>
+                <a:latin typeface="Avenir Medium" panose="02000503020000020003" pitchFamily="2" charset="0"/>
+                <a:ea typeface="Bodoni Ornaments" pitchFamily="2" charset="0"/>
+              </a:rPr>
+              <a:t>G / C /  G /  D</a:t>
+            </a:r>
+          </a:p>
           <a:p>
             <a:pPr algn="l"/>
             <a:endParaRPr lang="en-US" sz="3600" dirty="0">
@@ -12512,7 +12525,7 @@
                 <a:latin typeface="Avenir Medium" panose="02000503020000020003" pitchFamily="2" charset="0"/>
                 <a:ea typeface="Bodoni Ornaments" pitchFamily="2" charset="0"/>
               </a:rPr>
-              <a:t>                   Em</a:t>
+              <a:t>                   G</a:t>
             </a:r>
           </a:p>
           <a:p>
